--- a/day1/Day1_MiniZinc_Slides.pptx
+++ b/day1/Day1_MiniZinc_Slides.pptx
@@ -17988,7 +17988,7 @@
                 <a:ea typeface="Calibri" pitchFamily="34" charset="-122"/>
                 <a:cs typeface="Calibri" pitchFamily="34" charset="-120"/>
               </a:rPr>
-              <a:t>constraint a &gt;= 5; และ b &gt;= 3; — คำตอบเปลี่ยนไปไหม?</a:t>
+              <a:t>constraint a &gt;= 5; และ b &gt;= 10; — คำตอบเปลี่ยนไปไหม?</a:t>
             </a:r>
             <a:endParaRPr lang="en-US" sz="1050" dirty="0"/>
           </a:p>
